--- a/docs/pptx/week-5-supervisor.pptx
+++ b/docs/pptx/week-5-supervisor.pptx
@@ -3346,6 +3346,14 @@
                 <a:latin typeface="Calibri"/>
               </a:rPr>
               <a:t>Set expectations on participation. "If you're a supervisor, your job is to ask; if you're a builder, your job is to answer like you'd answer your boss."</a:t>
+            </a:r>
+          </a:p>
+          <a:p>
+            <a:r>
+              <a:rPr sz="1100">
+                <a:latin typeface="Calibri"/>
+              </a:rPr>
+              <a:t>Facilitator: the published joint-session agenda — extended timing, Exercise C, room setup, optional live tool review and "Yes" criteria workshop — lives on the Course 5 page at courses/supervisor.html#joint-session-agenda . Open it in a tab before the session.</a:t>
             </a:r>
           </a:p>
           <a:p>
@@ -7853,7 +7861,7 @@
         <p:spPr>
           <a:xfrm>
             <a:off x="3374136" y="475488"/>
-            <a:ext cx="8314639" cy="640080"/>
+            <a:ext cx="8314639" cy="946912"/>
           </a:xfrm>
           <a:prstGeom prst="rect">
             <a:avLst/>
@@ -7861,7 +7869,7 @@
           <a:noFill/>
         </p:spPr>
         <p:txBody>
-          <a:bodyPr wrap="square" lIns="0" rIns="0" tIns="0" bIns="0" anchor="ctr">
+          <a:bodyPr wrap="square" lIns="0" rIns="0" tIns="0" bIns="0" anchor="t">
             <a:spAutoFit/>
           </a:bodyPr>
           <a:lstStyle/>
@@ -7887,7 +7895,7 @@
         </p:nvSpPr>
         <p:spPr>
           <a:xfrm>
-            <a:off x="502920" y="1005840"/>
+            <a:off x="502920" y="1532128"/>
             <a:ext cx="11185855" cy="12700"/>
           </a:xfrm>
           <a:prstGeom prst="rect">
@@ -7931,7 +7939,7 @@
         </p:nvSpPr>
         <p:spPr>
           <a:xfrm>
-            <a:off x="502920" y="1115568"/>
+            <a:off x="502920" y="1641856"/>
             <a:ext cx="5410047" cy="365760"/>
           </a:xfrm>
           <a:prstGeom prst="rect">
@@ -7966,7 +7974,7 @@
         </p:nvSpPr>
         <p:spPr>
           <a:xfrm>
-            <a:off x="502920" y="1481328"/>
+            <a:off x="502920" y="2007616"/>
             <a:ext cx="5410047" cy="19050"/>
           </a:xfrm>
           <a:prstGeom prst="rect">
@@ -8010,8 +8018,8 @@
         </p:nvSpPr>
         <p:spPr>
           <a:xfrm>
-            <a:off x="502920" y="1664208"/>
-            <a:ext cx="5410047" cy="4690872"/>
+            <a:off x="502920" y="2190496"/>
+            <a:ext cx="5410047" cy="4164584"/>
           </a:xfrm>
           <a:prstGeom prst="rect">
             <a:avLst/>
@@ -8209,7 +8217,7 @@
         </p:nvSpPr>
         <p:spPr>
           <a:xfrm>
-            <a:off x="6278727" y="1115568"/>
+            <a:off x="6278727" y="1641856"/>
             <a:ext cx="5410047" cy="365760"/>
           </a:xfrm>
           <a:prstGeom prst="rect">
@@ -8244,7 +8252,7 @@
         </p:nvSpPr>
         <p:spPr>
           <a:xfrm>
-            <a:off x="6278727" y="1481328"/>
+            <a:off x="6278727" y="2007616"/>
             <a:ext cx="5410047" cy="19050"/>
           </a:xfrm>
           <a:prstGeom prst="rect">
@@ -8288,8 +8296,8 @@
         </p:nvSpPr>
         <p:spPr>
           <a:xfrm>
-            <a:off x="6278727" y="1664208"/>
-            <a:ext cx="5410047" cy="4690872"/>
+            <a:off x="6278727" y="2190496"/>
+            <a:ext cx="5410047" cy="4164584"/>
           </a:xfrm>
           <a:prstGeom prst="rect">
             <a:avLst/>
@@ -8735,7 +8743,7 @@
         <p:spPr>
           <a:xfrm>
             <a:off x="2779776" y="475488"/>
-            <a:ext cx="8908999" cy="640080"/>
+            <a:ext cx="8908999" cy="555752"/>
           </a:xfrm>
           <a:prstGeom prst="rect">
             <a:avLst/>
@@ -8787,7 +8795,7 @@
         </p:nvSpPr>
         <p:spPr>
           <a:xfrm>
-            <a:off x="502920" y="1005840"/>
+            <a:off x="502920" y="1140968"/>
             <a:ext cx="11185855" cy="12700"/>
           </a:xfrm>
           <a:prstGeom prst="rect">
@@ -8831,8 +8839,8 @@
         </p:nvSpPr>
         <p:spPr>
           <a:xfrm>
-            <a:off x="502920" y="1298448"/>
-            <a:ext cx="11185855" cy="5056632"/>
+            <a:off x="502920" y="1433576"/>
+            <a:ext cx="11185855" cy="4921504"/>
           </a:xfrm>
           <a:prstGeom prst="rect">
             <a:avLst/>
@@ -8875,8 +8883,8 @@
         </p:nvSpPr>
         <p:spPr>
           <a:xfrm>
-            <a:off x="502920" y="1298448"/>
-            <a:ext cx="91440" cy="5056632"/>
+            <a:off x="502920" y="1433576"/>
+            <a:ext cx="91440" cy="4921504"/>
           </a:xfrm>
           <a:prstGeom prst="rect">
             <a:avLst/>
@@ -8919,7 +8927,7 @@
         </p:nvSpPr>
         <p:spPr>
           <a:xfrm>
-            <a:off x="868680" y="1618488"/>
+            <a:off x="868680" y="1753616"/>
             <a:ext cx="502920" cy="502920"/>
           </a:xfrm>
           <a:prstGeom prst="ellipse">
@@ -8972,7 +8980,7 @@
         </p:nvSpPr>
         <p:spPr>
           <a:xfrm>
-            <a:off x="1645920" y="1572768"/>
+            <a:off x="1645920" y="1707896"/>
             <a:ext cx="9768535" cy="457200"/>
           </a:xfrm>
           <a:prstGeom prst="rect">
@@ -9011,8 +9019,8 @@
         </p:nvSpPr>
         <p:spPr>
           <a:xfrm>
-            <a:off x="1645920" y="1956816"/>
-            <a:ext cx="9768535" cy="715518"/>
+            <a:off x="1645920" y="2091944"/>
+            <a:ext cx="9768535" cy="681736"/>
           </a:xfrm>
           <a:prstGeom prst="rect">
             <a:avLst/>
@@ -9050,7 +9058,7 @@
         </p:nvSpPr>
         <p:spPr>
           <a:xfrm>
-            <a:off x="868680" y="2745486"/>
+            <a:off x="868680" y="2846832"/>
             <a:ext cx="502920" cy="502920"/>
           </a:xfrm>
           <a:prstGeom prst="ellipse">
@@ -9103,7 +9111,7 @@
         </p:nvSpPr>
         <p:spPr>
           <a:xfrm>
-            <a:off x="1645920" y="2699766"/>
+            <a:off x="1645920" y="2801112"/>
             <a:ext cx="9768535" cy="457200"/>
           </a:xfrm>
           <a:prstGeom prst="rect">
@@ -9142,8 +9150,8 @@
         </p:nvSpPr>
         <p:spPr>
           <a:xfrm>
-            <a:off x="1645920" y="3083814"/>
-            <a:ext cx="9768535" cy="715518"/>
+            <a:off x="1645920" y="3185160"/>
+            <a:ext cx="9768535" cy="681736"/>
           </a:xfrm>
           <a:prstGeom prst="rect">
             <a:avLst/>
@@ -9181,7 +9189,7 @@
         </p:nvSpPr>
         <p:spPr>
           <a:xfrm>
-            <a:off x="868680" y="3872484"/>
+            <a:off x="868680" y="3940048"/>
             <a:ext cx="502920" cy="502920"/>
           </a:xfrm>
           <a:prstGeom prst="ellipse">
@@ -9234,7 +9242,7 @@
         </p:nvSpPr>
         <p:spPr>
           <a:xfrm>
-            <a:off x="1645920" y="3826764"/>
+            <a:off x="1645920" y="3894328"/>
             <a:ext cx="9768535" cy="457200"/>
           </a:xfrm>
           <a:prstGeom prst="rect">
@@ -9273,8 +9281,8 @@
         </p:nvSpPr>
         <p:spPr>
           <a:xfrm>
-            <a:off x="1645920" y="4210812"/>
-            <a:ext cx="9768535" cy="715518"/>
+            <a:off x="1645920" y="4278376"/>
+            <a:ext cx="9768535" cy="681736"/>
           </a:xfrm>
           <a:prstGeom prst="rect">
             <a:avLst/>
@@ -9312,7 +9320,7 @@
         </p:nvSpPr>
         <p:spPr>
           <a:xfrm>
-            <a:off x="868680" y="4999482"/>
+            <a:off x="868680" y="5033264"/>
             <a:ext cx="502920" cy="502920"/>
           </a:xfrm>
           <a:prstGeom prst="ellipse">
@@ -9365,7 +9373,7 @@
         </p:nvSpPr>
         <p:spPr>
           <a:xfrm>
-            <a:off x="1645920" y="4953762"/>
+            <a:off x="1645920" y="4987544"/>
             <a:ext cx="9768535" cy="457200"/>
           </a:xfrm>
           <a:prstGeom prst="rect">
@@ -9404,8 +9412,8 @@
         </p:nvSpPr>
         <p:spPr>
           <a:xfrm>
-            <a:off x="1645920" y="5337810"/>
-            <a:ext cx="9768535" cy="715518"/>
+            <a:off x="1645920" y="5371592"/>
+            <a:ext cx="9768535" cy="681736"/>
           </a:xfrm>
           <a:prstGeom prst="rect">
             <a:avLst/>
@@ -9727,7 +9735,7 @@
         <p:spPr>
           <a:xfrm>
             <a:off x="3730752" y="475488"/>
-            <a:ext cx="7958023" cy="640080"/>
+            <a:ext cx="7958023" cy="555752"/>
           </a:xfrm>
           <a:prstGeom prst="rect">
             <a:avLst/>
@@ -9761,7 +9769,7 @@
         </p:nvSpPr>
         <p:spPr>
           <a:xfrm>
-            <a:off x="502920" y="1005840"/>
+            <a:off x="502920" y="1140968"/>
             <a:ext cx="11185855" cy="12700"/>
           </a:xfrm>
           <a:prstGeom prst="rect">
@@ -9805,7 +9813,7 @@
         </p:nvSpPr>
         <p:spPr>
           <a:xfrm>
-            <a:off x="502920" y="1115568"/>
+            <a:off x="502920" y="1250696"/>
             <a:ext cx="5410047" cy="640080"/>
           </a:xfrm>
           <a:prstGeom prst="rect">
@@ -9844,8 +9852,8 @@
         </p:nvSpPr>
         <p:spPr>
           <a:xfrm>
-            <a:off x="502920" y="1892808"/>
-            <a:ext cx="5410047" cy="4462272"/>
+            <a:off x="502920" y="2027936"/>
+            <a:ext cx="5410047" cy="4327144"/>
           </a:xfrm>
           <a:prstGeom prst="rect">
             <a:avLst/>
@@ -10042,8 +10050,8 @@
         </p:nvSpPr>
         <p:spPr>
           <a:xfrm>
-            <a:off x="6278727" y="1755648"/>
-            <a:ext cx="5410047" cy="3959352"/>
+            <a:off x="6278727" y="1890776"/>
+            <a:ext cx="5410047" cy="3824224"/>
           </a:xfrm>
           <a:prstGeom prst="rect">
             <a:avLst/>
@@ -10086,8 +10094,8 @@
         </p:nvSpPr>
         <p:spPr>
           <a:xfrm>
-            <a:off x="6278727" y="1755648"/>
-            <a:ext cx="91440" cy="3959352"/>
+            <a:off x="6278727" y="1890776"/>
+            <a:ext cx="91440" cy="3824224"/>
           </a:xfrm>
           <a:prstGeom prst="rect">
             <a:avLst/>
@@ -10130,7 +10138,7 @@
         </p:nvSpPr>
         <p:spPr>
           <a:xfrm>
-            <a:off x="6644487" y="2029968"/>
+            <a:off x="6644487" y="2165096"/>
             <a:ext cx="4861407" cy="457200"/>
           </a:xfrm>
           <a:prstGeom prst="rect">
@@ -10165,7 +10173,7 @@
         </p:nvSpPr>
         <p:spPr>
           <a:xfrm>
-            <a:off x="6644487" y="2624328"/>
+            <a:off x="6644487" y="2759456"/>
             <a:ext cx="4861407" cy="1280160"/>
           </a:xfrm>
           <a:prstGeom prst="rect">
@@ -10204,7 +10212,7 @@
         </p:nvSpPr>
         <p:spPr>
           <a:xfrm>
-            <a:off x="6644487" y="3767328"/>
+            <a:off x="6644487" y="3902456"/>
             <a:ext cx="4861407" cy="1828800"/>
           </a:xfrm>
           <a:prstGeom prst="rect">
@@ -10754,7 +10762,7 @@
         <p:spPr>
           <a:xfrm>
             <a:off x="4087368" y="475488"/>
-            <a:ext cx="7601407" cy="640080"/>
+            <a:ext cx="7601407" cy="555752"/>
           </a:xfrm>
           <a:prstGeom prst="rect">
             <a:avLst/>
@@ -10788,7 +10796,7 @@
         </p:nvSpPr>
         <p:spPr>
           <a:xfrm>
-            <a:off x="502920" y="1005840"/>
+            <a:off x="502920" y="1140968"/>
             <a:ext cx="11185855" cy="12700"/>
           </a:xfrm>
           <a:prstGeom prst="rect">
@@ -10832,7 +10840,7 @@
         </p:nvSpPr>
         <p:spPr>
           <a:xfrm>
-            <a:off x="502920" y="1298448"/>
+            <a:off x="502920" y="1433576"/>
             <a:ext cx="502920" cy="502920"/>
           </a:xfrm>
           <a:prstGeom prst="ellipse">
@@ -10885,7 +10893,7 @@
         </p:nvSpPr>
         <p:spPr>
           <a:xfrm>
-            <a:off x="1280160" y="1252728"/>
+            <a:off x="1280160" y="1387856"/>
             <a:ext cx="10408615" cy="457200"/>
           </a:xfrm>
           <a:prstGeom prst="rect">
@@ -10924,8 +10932,8 @@
         </p:nvSpPr>
         <p:spPr>
           <a:xfrm>
-            <a:off x="1280160" y="1664208"/>
-            <a:ext cx="10408615" cy="555498"/>
+            <a:off x="1280160" y="1799336"/>
+            <a:ext cx="10408615" cy="521716"/>
           </a:xfrm>
           <a:prstGeom prst="rect">
             <a:avLst/>
@@ -10963,7 +10971,7 @@
         </p:nvSpPr>
         <p:spPr>
           <a:xfrm>
-            <a:off x="502920" y="2311146"/>
+            <a:off x="502920" y="2412492"/>
             <a:ext cx="502920" cy="502920"/>
           </a:xfrm>
           <a:prstGeom prst="ellipse">
@@ -11016,7 +11024,7 @@
         </p:nvSpPr>
         <p:spPr>
           <a:xfrm>
-            <a:off x="1280160" y="2265426"/>
+            <a:off x="1280160" y="2366772"/>
             <a:ext cx="10408615" cy="457200"/>
           </a:xfrm>
           <a:prstGeom prst="rect">
@@ -11055,8 +11063,8 @@
         </p:nvSpPr>
         <p:spPr>
           <a:xfrm>
-            <a:off x="1280160" y="2676906"/>
-            <a:ext cx="10408615" cy="555498"/>
+            <a:off x="1280160" y="2778252"/>
+            <a:ext cx="10408615" cy="521716"/>
           </a:xfrm>
           <a:prstGeom prst="rect">
             <a:avLst/>
@@ -11094,7 +11102,7 @@
         </p:nvSpPr>
         <p:spPr>
           <a:xfrm>
-            <a:off x="502920" y="3323844"/>
+            <a:off x="502920" y="3391408"/>
             <a:ext cx="502920" cy="502920"/>
           </a:xfrm>
           <a:prstGeom prst="ellipse">
@@ -11147,7 +11155,7 @@
         </p:nvSpPr>
         <p:spPr>
           <a:xfrm>
-            <a:off x="1280160" y="3278124"/>
+            <a:off x="1280160" y="3345688"/>
             <a:ext cx="10408615" cy="457200"/>
           </a:xfrm>
           <a:prstGeom prst="rect">
@@ -11186,8 +11194,8 @@
         </p:nvSpPr>
         <p:spPr>
           <a:xfrm>
-            <a:off x="1280160" y="3689604"/>
-            <a:ext cx="10408615" cy="555498"/>
+            <a:off x="1280160" y="3757168"/>
+            <a:ext cx="10408615" cy="521716"/>
           </a:xfrm>
           <a:prstGeom prst="rect">
             <a:avLst/>
@@ -11225,7 +11233,7 @@
         </p:nvSpPr>
         <p:spPr>
           <a:xfrm>
-            <a:off x="502920" y="4336542"/>
+            <a:off x="502920" y="4370324"/>
             <a:ext cx="502920" cy="502920"/>
           </a:xfrm>
           <a:prstGeom prst="ellipse">
@@ -11278,7 +11286,7 @@
         </p:nvSpPr>
         <p:spPr>
           <a:xfrm>
-            <a:off x="1280160" y="4290822"/>
+            <a:off x="1280160" y="4324604"/>
             <a:ext cx="10408615" cy="457200"/>
           </a:xfrm>
           <a:prstGeom prst="rect">
@@ -11317,8 +11325,8 @@
         </p:nvSpPr>
         <p:spPr>
           <a:xfrm>
-            <a:off x="1280160" y="4702302"/>
-            <a:ext cx="10408615" cy="555498"/>
+            <a:off x="1280160" y="4736084"/>
+            <a:ext cx="10408615" cy="521716"/>
           </a:xfrm>
           <a:prstGeom prst="rect">
             <a:avLst/>
@@ -11724,7 +11732,7 @@
         <p:spPr>
           <a:xfrm>
             <a:off x="3730752" y="475488"/>
-            <a:ext cx="7958023" cy="640080"/>
+            <a:ext cx="7958023" cy="555752"/>
           </a:xfrm>
           <a:prstGeom prst="rect">
             <a:avLst/>
@@ -11758,7 +11766,7 @@
         </p:nvSpPr>
         <p:spPr>
           <a:xfrm>
-            <a:off x="502920" y="1005840"/>
+            <a:off x="502920" y="1140968"/>
             <a:ext cx="11185855" cy="12700"/>
           </a:xfrm>
           <a:prstGeom prst="rect">
@@ -11802,7 +11810,7 @@
         </p:nvSpPr>
         <p:spPr>
           <a:xfrm>
-            <a:off x="502920" y="1298448"/>
+            <a:off x="502920" y="1433576"/>
             <a:ext cx="11185855" cy="2194560"/>
           </a:xfrm>
           <a:prstGeom prst="rect">
@@ -11848,7 +11856,7 @@
         </p:nvSpPr>
         <p:spPr>
           <a:xfrm>
-            <a:off x="502920" y="1298448"/>
+            <a:off x="502920" y="1433576"/>
             <a:ext cx="91440" cy="2194560"/>
           </a:xfrm>
           <a:prstGeom prst="rect">
@@ -11892,7 +11900,7 @@
         </p:nvSpPr>
         <p:spPr>
           <a:xfrm>
-            <a:off x="777240" y="1527048"/>
+            <a:off x="777240" y="1662176"/>
             <a:ext cx="10637215" cy="320040"/>
           </a:xfrm>
           <a:prstGeom prst="rect">
@@ -11927,7 +11935,7 @@
         </p:nvSpPr>
         <p:spPr>
           <a:xfrm>
-            <a:off x="777240" y="1938528"/>
+            <a:off x="777240" y="2073656"/>
             <a:ext cx="10637215" cy="1463040"/>
           </a:xfrm>
           <a:prstGeom prst="rect">
@@ -11984,7 +11992,7 @@
         </p:nvSpPr>
         <p:spPr>
           <a:xfrm>
-            <a:off x="502920" y="3767328"/>
+            <a:off x="502920" y="3902456"/>
             <a:ext cx="11185855" cy="1280160"/>
           </a:xfrm>
           <a:prstGeom prst="rect">
@@ -12028,7 +12036,7 @@
         </p:nvSpPr>
         <p:spPr>
           <a:xfrm>
-            <a:off x="777240" y="3995928"/>
+            <a:off x="777240" y="4131056"/>
             <a:ext cx="10637215" cy="320040"/>
           </a:xfrm>
           <a:prstGeom prst="rect">
@@ -12063,7 +12071,7 @@
         </p:nvSpPr>
         <p:spPr>
           <a:xfrm>
-            <a:off x="777240" y="4361688"/>
+            <a:off x="777240" y="4496816"/>
             <a:ext cx="10637215" cy="640080"/>
           </a:xfrm>
           <a:prstGeom prst="rect">
@@ -12386,7 +12394,7 @@
         <p:spPr>
           <a:xfrm>
             <a:off x="3611880" y="475488"/>
-            <a:ext cx="8076895" cy="640080"/>
+            <a:ext cx="8076895" cy="555752"/>
           </a:xfrm>
           <a:prstGeom prst="rect">
             <a:avLst/>
@@ -12420,7 +12428,7 @@
         </p:nvSpPr>
         <p:spPr>
           <a:xfrm>
-            <a:off x="502920" y="1005840"/>
+            <a:off x="502920" y="1140968"/>
             <a:ext cx="11185855" cy="12700"/>
           </a:xfrm>
           <a:prstGeom prst="rect">
@@ -12464,8 +12472,8 @@
         </p:nvSpPr>
         <p:spPr>
           <a:xfrm>
-            <a:off x="502920" y="1207008"/>
-            <a:ext cx="5410047" cy="5148072"/>
+            <a:off x="502920" y="1342136"/>
+            <a:ext cx="5410047" cy="5012944"/>
           </a:xfrm>
           <a:prstGeom prst="rect">
             <a:avLst/>
@@ -12635,8 +12643,8 @@
         </p:nvSpPr>
         <p:spPr>
           <a:xfrm>
-            <a:off x="6278727" y="1664208"/>
-            <a:ext cx="5410047" cy="4233672"/>
+            <a:off x="6278727" y="1799336"/>
+            <a:ext cx="5410047" cy="4098544"/>
           </a:xfrm>
           <a:prstGeom prst="rect">
             <a:avLst/>
@@ -12679,8 +12687,8 @@
         </p:nvSpPr>
         <p:spPr>
           <a:xfrm>
-            <a:off x="6278727" y="1664208"/>
-            <a:ext cx="91440" cy="4233672"/>
+            <a:off x="6278727" y="1799336"/>
+            <a:ext cx="91440" cy="4098544"/>
           </a:xfrm>
           <a:prstGeom prst="rect">
             <a:avLst/>
@@ -12723,7 +12731,7 @@
         </p:nvSpPr>
         <p:spPr>
           <a:xfrm>
-            <a:off x="6644487" y="1938528"/>
+            <a:off x="6644487" y="2073656"/>
             <a:ext cx="4861407" cy="457200"/>
           </a:xfrm>
           <a:prstGeom prst="rect">
@@ -12758,8 +12766,8 @@
         </p:nvSpPr>
         <p:spPr>
           <a:xfrm>
-            <a:off x="6644487" y="2532888"/>
-            <a:ext cx="4861407" cy="3136392"/>
+            <a:off x="6644487" y="2668016"/>
+            <a:ext cx="4861407" cy="3001264"/>
           </a:xfrm>
           <a:prstGeom prst="rect">
             <a:avLst/>
@@ -13117,7 +13125,7 @@
         <p:spPr>
           <a:xfrm>
             <a:off x="3730752" y="475488"/>
-            <a:ext cx="7958023" cy="640080"/>
+            <a:ext cx="7958023" cy="555752"/>
           </a:xfrm>
           <a:prstGeom prst="rect">
             <a:avLst/>
@@ -13151,7 +13159,7 @@
         </p:nvSpPr>
         <p:spPr>
           <a:xfrm>
-            <a:off x="502920" y="1005840"/>
+            <a:off x="502920" y="1140968"/>
             <a:ext cx="11185855" cy="12700"/>
           </a:xfrm>
           <a:prstGeom prst="rect">
@@ -13195,7 +13203,7 @@
         </p:nvSpPr>
         <p:spPr>
           <a:xfrm>
-            <a:off x="502920" y="1298448"/>
+            <a:off x="502920" y="1433576"/>
             <a:ext cx="11185855" cy="2194560"/>
           </a:xfrm>
           <a:prstGeom prst="rect">
@@ -13241,7 +13249,7 @@
         </p:nvSpPr>
         <p:spPr>
           <a:xfrm>
-            <a:off x="502920" y="1298448"/>
+            <a:off x="502920" y="1433576"/>
             <a:ext cx="91440" cy="2194560"/>
           </a:xfrm>
           <a:prstGeom prst="rect">
@@ -13285,7 +13293,7 @@
         </p:nvSpPr>
         <p:spPr>
           <a:xfrm>
-            <a:off x="777240" y="1527048"/>
+            <a:off x="777240" y="1662176"/>
             <a:ext cx="10637215" cy="320040"/>
           </a:xfrm>
           <a:prstGeom prst="rect">
@@ -13320,7 +13328,7 @@
         </p:nvSpPr>
         <p:spPr>
           <a:xfrm>
-            <a:off x="777240" y="1938528"/>
+            <a:off x="777240" y="2073656"/>
             <a:ext cx="10637215" cy="1463040"/>
           </a:xfrm>
           <a:prstGeom prst="rect">
@@ -13377,7 +13385,7 @@
         </p:nvSpPr>
         <p:spPr>
           <a:xfrm>
-            <a:off x="502920" y="3767328"/>
+            <a:off x="502920" y="3902456"/>
             <a:ext cx="11185855" cy="1280160"/>
           </a:xfrm>
           <a:prstGeom prst="rect">
@@ -13421,7 +13429,7 @@
         </p:nvSpPr>
         <p:spPr>
           <a:xfrm>
-            <a:off x="777240" y="3995928"/>
+            <a:off x="777240" y="4131056"/>
             <a:ext cx="10637215" cy="320040"/>
           </a:xfrm>
           <a:prstGeom prst="rect">
@@ -13456,7 +13464,7 @@
         </p:nvSpPr>
         <p:spPr>
           <a:xfrm>
-            <a:off x="777240" y="4361688"/>
+            <a:off x="777240" y="4496816"/>
             <a:ext cx="10637215" cy="640080"/>
           </a:xfrm>
           <a:prstGeom prst="rect">
@@ -13779,7 +13787,7 @@
         <p:spPr>
           <a:xfrm>
             <a:off x="3611880" y="475488"/>
-            <a:ext cx="8076895" cy="640080"/>
+            <a:ext cx="8076895" cy="555752"/>
           </a:xfrm>
           <a:prstGeom prst="rect">
             <a:avLst/>
@@ -13813,7 +13821,7 @@
         </p:nvSpPr>
         <p:spPr>
           <a:xfrm>
-            <a:off x="502920" y="1005840"/>
+            <a:off x="502920" y="1140968"/>
             <a:ext cx="11185855" cy="12700"/>
           </a:xfrm>
           <a:prstGeom prst="rect">
@@ -13857,8 +13865,8 @@
         </p:nvSpPr>
         <p:spPr>
           <a:xfrm>
-            <a:off x="502920" y="1207008"/>
-            <a:ext cx="5410047" cy="5148072"/>
+            <a:off x="502920" y="1342136"/>
+            <a:ext cx="5410047" cy="5012944"/>
           </a:xfrm>
           <a:prstGeom prst="rect">
             <a:avLst/>
@@ -14028,8 +14036,8 @@
         </p:nvSpPr>
         <p:spPr>
           <a:xfrm>
-            <a:off x="6278727" y="1664208"/>
-            <a:ext cx="5410047" cy="4233672"/>
+            <a:off x="6278727" y="1799336"/>
+            <a:ext cx="5410047" cy="4098544"/>
           </a:xfrm>
           <a:prstGeom prst="rect">
             <a:avLst/>
@@ -14074,8 +14082,8 @@
         </p:nvSpPr>
         <p:spPr>
           <a:xfrm>
-            <a:off x="6278727" y="1664208"/>
-            <a:ext cx="91440" cy="4233672"/>
+            <a:off x="6278727" y="1799336"/>
+            <a:ext cx="91440" cy="4098544"/>
           </a:xfrm>
           <a:prstGeom prst="rect">
             <a:avLst/>
@@ -14118,7 +14126,7 @@
         </p:nvSpPr>
         <p:spPr>
           <a:xfrm>
-            <a:off x="6644487" y="1938528"/>
+            <a:off x="6644487" y="2073656"/>
             <a:ext cx="4861407" cy="457200"/>
           </a:xfrm>
           <a:prstGeom prst="rect">
@@ -14153,8 +14161,8 @@
         </p:nvSpPr>
         <p:spPr>
           <a:xfrm>
-            <a:off x="6644487" y="2532888"/>
-            <a:ext cx="4861407" cy="3136392"/>
+            <a:off x="6644487" y="2668016"/>
+            <a:ext cx="4861407" cy="3001264"/>
           </a:xfrm>
           <a:prstGeom prst="rect">
             <a:avLst/>
@@ -14721,7 +14729,7 @@
         <p:spPr>
           <a:xfrm>
             <a:off x="2898648" y="475488"/>
-            <a:ext cx="8790127" cy="640080"/>
+            <a:ext cx="8790127" cy="555752"/>
           </a:xfrm>
           <a:prstGeom prst="rect">
             <a:avLst/>
@@ -14755,7 +14763,7 @@
         </p:nvSpPr>
         <p:spPr>
           <a:xfrm>
-            <a:off x="502920" y="1005840"/>
+            <a:off x="502920" y="1140968"/>
             <a:ext cx="11185855" cy="12700"/>
           </a:xfrm>
           <a:prstGeom prst="rect">
@@ -14799,8 +14807,8 @@
         </p:nvSpPr>
         <p:spPr>
           <a:xfrm>
-            <a:off x="502920" y="1115568"/>
-            <a:ext cx="5455767" cy="5239512"/>
+            <a:off x="502920" y="1250696"/>
+            <a:ext cx="5455767" cy="5104384"/>
           </a:xfrm>
           <a:prstGeom prst="rect">
             <a:avLst/>
@@ -14845,7 +14853,7 @@
         </p:nvSpPr>
         <p:spPr>
           <a:xfrm>
-            <a:off x="502920" y="1115568"/>
+            <a:off x="502920" y="1250696"/>
             <a:ext cx="5455767" cy="64008"/>
           </a:xfrm>
           <a:prstGeom prst="rect">
@@ -14889,7 +14897,7 @@
         </p:nvSpPr>
         <p:spPr>
           <a:xfrm>
-            <a:off x="777240" y="1389888"/>
+            <a:off x="777240" y="1525016"/>
             <a:ext cx="4907127" cy="274320"/>
           </a:xfrm>
           <a:prstGeom prst="rect">
@@ -14924,7 +14932,7 @@
         </p:nvSpPr>
         <p:spPr>
           <a:xfrm>
-            <a:off x="777240" y="1709928"/>
+            <a:off x="777240" y="1845056"/>
             <a:ext cx="4907127" cy="1097280"/>
           </a:xfrm>
           <a:prstGeom prst="rect">
@@ -14963,8 +14971,8 @@
         </p:nvSpPr>
         <p:spPr>
           <a:xfrm>
-            <a:off x="777240" y="2990088"/>
-            <a:ext cx="4907127" cy="3319272"/>
+            <a:off x="777240" y="3125216"/>
+            <a:ext cx="4907127" cy="3184144"/>
           </a:xfrm>
           <a:prstGeom prst="rect">
             <a:avLst/>
@@ -15079,8 +15087,8 @@
         </p:nvSpPr>
         <p:spPr>
           <a:xfrm>
-            <a:off x="6233007" y="1115568"/>
-            <a:ext cx="5455767" cy="5239512"/>
+            <a:off x="6233007" y="1250696"/>
+            <a:ext cx="5455767" cy="5104384"/>
           </a:xfrm>
           <a:prstGeom prst="rect">
             <a:avLst/>
@@ -15125,7 +15133,7 @@
         </p:nvSpPr>
         <p:spPr>
           <a:xfrm>
-            <a:off x="6233007" y="1115568"/>
+            <a:off x="6233007" y="1250696"/>
             <a:ext cx="5455767" cy="64008"/>
           </a:xfrm>
           <a:prstGeom prst="rect">
@@ -15169,7 +15177,7 @@
         </p:nvSpPr>
         <p:spPr>
           <a:xfrm>
-            <a:off x="6507327" y="1389888"/>
+            <a:off x="6507327" y="1525016"/>
             <a:ext cx="4907127" cy="274320"/>
           </a:xfrm>
           <a:prstGeom prst="rect">
@@ -15204,7 +15212,7 @@
         </p:nvSpPr>
         <p:spPr>
           <a:xfrm>
-            <a:off x="6507327" y="1709928"/>
+            <a:off x="6507327" y="1845056"/>
             <a:ext cx="4907127" cy="1097280"/>
           </a:xfrm>
           <a:prstGeom prst="rect">
@@ -15243,8 +15251,8 @@
         </p:nvSpPr>
         <p:spPr>
           <a:xfrm>
-            <a:off x="6507327" y="2990088"/>
-            <a:ext cx="4907127" cy="3319272"/>
+            <a:off x="6507327" y="3125216"/>
+            <a:ext cx="4907127" cy="3184144"/>
           </a:xfrm>
           <a:prstGeom prst="rect">
             <a:avLst/>
@@ -15661,7 +15669,7 @@
         <p:spPr>
           <a:xfrm>
             <a:off x="2542032" y="475488"/>
-            <a:ext cx="9146743" cy="640080"/>
+            <a:ext cx="9146743" cy="555752"/>
           </a:xfrm>
           <a:prstGeom prst="rect">
             <a:avLst/>
@@ -15695,7 +15703,7 @@
         </p:nvSpPr>
         <p:spPr>
           <a:xfrm>
-            <a:off x="502920" y="1005840"/>
+            <a:off x="502920" y="1140968"/>
             <a:ext cx="11185855" cy="12700"/>
           </a:xfrm>
           <a:prstGeom prst="rect">
@@ -15739,8 +15747,8 @@
         </p:nvSpPr>
         <p:spPr>
           <a:xfrm>
-            <a:off x="502920" y="1207008"/>
-            <a:ext cx="5951052" cy="5056632"/>
+            <a:off x="502920" y="1342136"/>
+            <a:ext cx="5951052" cy="4921504"/>
           </a:xfrm>
           <a:prstGeom prst="rect">
             <a:avLst/>
@@ -15783,7 +15791,7 @@
         </p:nvSpPr>
         <p:spPr>
           <a:xfrm>
-            <a:off x="777240" y="841248"/>
+            <a:off x="777240" y="976376"/>
             <a:ext cx="1828800" cy="1828800"/>
           </a:xfrm>
           <a:prstGeom prst="rect">
@@ -15818,8 +15826,8 @@
         </p:nvSpPr>
         <p:spPr>
           <a:xfrm>
-            <a:off x="914400" y="1892808"/>
-            <a:ext cx="5128092" cy="3319272"/>
+            <a:off x="914400" y="2027936"/>
+            <a:ext cx="5128092" cy="3184144"/>
           </a:xfrm>
           <a:prstGeom prst="rect">
             <a:avLst/>
@@ -15892,8 +15900,8 @@
         </p:nvSpPr>
         <p:spPr>
           <a:xfrm>
-            <a:off x="6819732" y="1207008"/>
-            <a:ext cx="4869042" cy="1502664"/>
+            <a:off x="6819732" y="1342136"/>
+            <a:ext cx="4869042" cy="1457621"/>
           </a:xfrm>
           <a:prstGeom prst="rect">
             <a:avLst/>
@@ -15938,8 +15946,8 @@
         </p:nvSpPr>
         <p:spPr>
           <a:xfrm>
-            <a:off x="6819732" y="1207008"/>
-            <a:ext cx="64008" cy="1502664"/>
+            <a:off x="6819732" y="1342136"/>
+            <a:ext cx="64008" cy="1457621"/>
           </a:xfrm>
           <a:prstGeom prst="rect">
             <a:avLst/>
@@ -15982,7 +15990,7 @@
         </p:nvSpPr>
         <p:spPr>
           <a:xfrm>
-            <a:off x="7094052" y="1435608"/>
+            <a:off x="7094052" y="1570736"/>
             <a:ext cx="2194560" cy="822960"/>
           </a:xfrm>
           <a:prstGeom prst="rect">
@@ -16017,8 +16025,8 @@
         </p:nvSpPr>
         <p:spPr>
           <a:xfrm>
-            <a:off x="9380052" y="1481328"/>
-            <a:ext cx="2217282" cy="1045464"/>
+            <a:off x="9380052" y="1616456"/>
+            <a:ext cx="2217282" cy="1000421"/>
           </a:xfrm>
           <a:prstGeom prst="rect">
             <a:avLst/>
@@ -16065,8 +16073,8 @@
         </p:nvSpPr>
         <p:spPr>
           <a:xfrm>
-            <a:off x="6819732" y="2892552"/>
-            <a:ext cx="4869042" cy="1502664"/>
+            <a:off x="6819732" y="2982637"/>
+            <a:ext cx="4869042" cy="1457621"/>
           </a:xfrm>
           <a:prstGeom prst="rect">
             <a:avLst/>
@@ -16111,8 +16119,8 @@
         </p:nvSpPr>
         <p:spPr>
           <a:xfrm>
-            <a:off x="6819732" y="2892552"/>
-            <a:ext cx="64008" cy="1502664"/>
+            <a:off x="6819732" y="2982637"/>
+            <a:ext cx="64008" cy="1457621"/>
           </a:xfrm>
           <a:prstGeom prst="rect">
             <a:avLst/>
@@ -16155,7 +16163,7 @@
         </p:nvSpPr>
         <p:spPr>
           <a:xfrm>
-            <a:off x="7094052" y="3121152"/>
+            <a:off x="7094052" y="3211237"/>
             <a:ext cx="2194560" cy="822960"/>
           </a:xfrm>
           <a:prstGeom prst="rect">
@@ -16190,8 +16198,8 @@
         </p:nvSpPr>
         <p:spPr>
           <a:xfrm>
-            <a:off x="9380052" y="3166872"/>
-            <a:ext cx="2217282" cy="1045464"/>
+            <a:off x="9380052" y="3256957"/>
+            <a:ext cx="2217282" cy="1000421"/>
           </a:xfrm>
           <a:prstGeom prst="rect">
             <a:avLst/>
@@ -16229,8 +16237,8 @@
         </p:nvSpPr>
         <p:spPr>
           <a:xfrm>
-            <a:off x="6819732" y="4578096"/>
-            <a:ext cx="4869042" cy="1502664"/>
+            <a:off x="6819732" y="4623138"/>
+            <a:ext cx="4869042" cy="1457621"/>
           </a:xfrm>
           <a:prstGeom prst="rect">
             <a:avLst/>
@@ -16275,8 +16283,8 @@
         </p:nvSpPr>
         <p:spPr>
           <a:xfrm>
-            <a:off x="6819732" y="4578096"/>
-            <a:ext cx="64008" cy="1502664"/>
+            <a:off x="6819732" y="4623138"/>
+            <a:ext cx="64008" cy="1457621"/>
           </a:xfrm>
           <a:prstGeom prst="rect">
             <a:avLst/>
@@ -16319,7 +16327,7 @@
         </p:nvSpPr>
         <p:spPr>
           <a:xfrm>
-            <a:off x="7094052" y="4806696"/>
+            <a:off x="7094052" y="4851738"/>
             <a:ext cx="2194560" cy="822960"/>
           </a:xfrm>
           <a:prstGeom prst="rect">
@@ -16354,8 +16362,8 @@
         </p:nvSpPr>
         <p:spPr>
           <a:xfrm>
-            <a:off x="9380052" y="4852416"/>
-            <a:ext cx="2217282" cy="1045464"/>
+            <a:off x="9380052" y="4897458"/>
+            <a:ext cx="2217282" cy="1000421"/>
           </a:xfrm>
           <a:prstGeom prst="rect">
             <a:avLst/>
@@ -16677,7 +16685,7 @@
         <p:spPr>
           <a:xfrm>
             <a:off x="3968496" y="475488"/>
-            <a:ext cx="7720279" cy="640080"/>
+            <a:ext cx="7720279" cy="946912"/>
           </a:xfrm>
           <a:prstGeom prst="rect">
             <a:avLst/>
@@ -16685,7 +16693,7 @@
           <a:noFill/>
         </p:spPr>
         <p:txBody>
-          <a:bodyPr wrap="square" lIns="0" rIns="0" tIns="0" bIns="0" anchor="ctr">
+          <a:bodyPr wrap="square" lIns="0" rIns="0" tIns="0" bIns="0" anchor="t">
             <a:spAutoFit/>
           </a:bodyPr>
           <a:lstStyle/>
@@ -16711,7 +16719,7 @@
         </p:nvSpPr>
         <p:spPr>
           <a:xfrm>
-            <a:off x="502920" y="1005840"/>
+            <a:off x="502920" y="1532128"/>
             <a:ext cx="11185855" cy="12700"/>
           </a:xfrm>
           <a:prstGeom prst="rect">
@@ -16755,7 +16763,7 @@
         </p:nvSpPr>
         <p:spPr>
           <a:xfrm>
-            <a:off x="502920" y="1298448"/>
+            <a:off x="502920" y="1824736"/>
             <a:ext cx="502920" cy="502920"/>
           </a:xfrm>
           <a:prstGeom prst="ellipse">
@@ -16808,7 +16816,7 @@
         </p:nvSpPr>
         <p:spPr>
           <a:xfrm>
-            <a:off x="1280160" y="1252728"/>
+            <a:off x="1280160" y="1779016"/>
             <a:ext cx="10408615" cy="457200"/>
           </a:xfrm>
           <a:prstGeom prst="rect">
@@ -16847,8 +16855,8 @@
         </p:nvSpPr>
         <p:spPr>
           <a:xfrm>
-            <a:off x="1280160" y="1664208"/>
-            <a:ext cx="10408615" cy="893064"/>
+            <a:off x="1280160" y="2190496"/>
+            <a:ext cx="10408615" cy="717634"/>
           </a:xfrm>
           <a:prstGeom prst="rect">
             <a:avLst/>
@@ -16886,7 +16894,7 @@
         </p:nvSpPr>
         <p:spPr>
           <a:xfrm>
-            <a:off x="502920" y="2648712"/>
+            <a:off x="502920" y="2999570"/>
             <a:ext cx="502920" cy="502920"/>
           </a:xfrm>
           <a:prstGeom prst="ellipse">
@@ -16939,7 +16947,7 @@
         </p:nvSpPr>
         <p:spPr>
           <a:xfrm>
-            <a:off x="1280160" y="2602992"/>
+            <a:off x="1280160" y="2953850"/>
             <a:ext cx="10408615" cy="457200"/>
           </a:xfrm>
           <a:prstGeom prst="rect">
@@ -16978,8 +16986,8 @@
         </p:nvSpPr>
         <p:spPr>
           <a:xfrm>
-            <a:off x="1280160" y="3014472"/>
-            <a:ext cx="10408615" cy="893064"/>
+            <a:off x="1280160" y="3365330"/>
+            <a:ext cx="10408615" cy="717634"/>
           </a:xfrm>
           <a:prstGeom prst="rect">
             <a:avLst/>
@@ -17017,7 +17025,7 @@
         </p:nvSpPr>
         <p:spPr>
           <a:xfrm>
-            <a:off x="502920" y="3998976"/>
+            <a:off x="502920" y="4174405"/>
             <a:ext cx="502920" cy="502920"/>
           </a:xfrm>
           <a:prstGeom prst="ellipse">
@@ -17070,7 +17078,7 @@
         </p:nvSpPr>
         <p:spPr>
           <a:xfrm>
-            <a:off x="1280160" y="3953256"/>
+            <a:off x="1280160" y="4128685"/>
             <a:ext cx="10408615" cy="457200"/>
           </a:xfrm>
           <a:prstGeom prst="rect">
@@ -17109,8 +17117,8 @@
         </p:nvSpPr>
         <p:spPr>
           <a:xfrm>
-            <a:off x="1280160" y="4364736"/>
-            <a:ext cx="10408615" cy="893064"/>
+            <a:off x="1280160" y="4540165"/>
+            <a:ext cx="10408615" cy="717634"/>
           </a:xfrm>
           <a:prstGeom prst="rect">
             <a:avLst/>
@@ -17498,7 +17506,7 @@
         <p:spPr>
           <a:xfrm>
             <a:off x="4562856" y="475488"/>
-            <a:ext cx="7125919" cy="640080"/>
+            <a:ext cx="7125919" cy="555752"/>
           </a:xfrm>
           <a:prstGeom prst="rect">
             <a:avLst/>
@@ -17532,7 +17540,7 @@
         </p:nvSpPr>
         <p:spPr>
           <a:xfrm>
-            <a:off x="502920" y="1005840"/>
+            <a:off x="502920" y="1140968"/>
             <a:ext cx="11185855" cy="12700"/>
           </a:xfrm>
           <a:prstGeom prst="rect">
@@ -17576,7 +17584,7 @@
         </p:nvSpPr>
         <p:spPr>
           <a:xfrm>
-            <a:off x="502920" y="1252728"/>
+            <a:off x="502920" y="1387856"/>
             <a:ext cx="11185855" cy="1463040"/>
           </a:xfrm>
           <a:prstGeom prst="rect">
@@ -17622,7 +17630,7 @@
         </p:nvSpPr>
         <p:spPr>
           <a:xfrm>
-            <a:off x="502920" y="1252728"/>
+            <a:off x="502920" y="1387856"/>
             <a:ext cx="91440" cy="1463040"/>
           </a:xfrm>
           <a:prstGeom prst="rect">
@@ -17666,7 +17674,7 @@
         </p:nvSpPr>
         <p:spPr>
           <a:xfrm>
-            <a:off x="777240" y="1417320"/>
+            <a:off x="777240" y="1552448"/>
             <a:ext cx="10637215" cy="274320"/>
           </a:xfrm>
           <a:prstGeom prst="rect">
@@ -17701,7 +17709,7 @@
         </p:nvSpPr>
         <p:spPr>
           <a:xfrm>
-            <a:off x="777240" y="1755648"/>
+            <a:off x="777240" y="1890776"/>
             <a:ext cx="10637215" cy="914400"/>
           </a:xfrm>
           <a:prstGeom prst="rect">
@@ -17740,7 +17748,7 @@
         </p:nvSpPr>
         <p:spPr>
           <a:xfrm>
-            <a:off x="502920" y="2990088"/>
+            <a:off x="502920" y="3125216"/>
             <a:ext cx="5410047" cy="365760"/>
           </a:xfrm>
           <a:prstGeom prst="rect">
@@ -17775,8 +17783,8 @@
         </p:nvSpPr>
         <p:spPr>
           <a:xfrm>
-            <a:off x="502920" y="3401568"/>
-            <a:ext cx="5410047" cy="2907792"/>
+            <a:off x="502920" y="3536696"/>
+            <a:ext cx="5410047" cy="2772664"/>
           </a:xfrm>
           <a:prstGeom prst="rect">
             <a:avLst/>
@@ -17882,7 +17890,7 @@
         </p:nvSpPr>
         <p:spPr>
           <a:xfrm>
-            <a:off x="6278727" y="2990088"/>
+            <a:off x="6278727" y="3125216"/>
             <a:ext cx="5410047" cy="365760"/>
           </a:xfrm>
           <a:prstGeom prst="rect">
@@ -17917,8 +17925,8 @@
         </p:nvSpPr>
         <p:spPr>
           <a:xfrm>
-            <a:off x="6278727" y="3401568"/>
-            <a:ext cx="5410047" cy="2907792"/>
+            <a:off x="6278727" y="3536696"/>
+            <a:ext cx="5410047" cy="2772664"/>
           </a:xfrm>
           <a:prstGeom prst="rect">
             <a:avLst/>
@@ -18553,7 +18561,7 @@
         <p:spPr>
           <a:xfrm>
             <a:off x="4919472" y="475488"/>
-            <a:ext cx="6769303" cy="640080"/>
+            <a:ext cx="6769303" cy="946912"/>
           </a:xfrm>
           <a:prstGeom prst="rect">
             <a:avLst/>
@@ -18561,7 +18569,7 @@
           <a:noFill/>
         </p:spPr>
         <p:txBody>
-          <a:bodyPr wrap="square" lIns="0" rIns="0" tIns="0" bIns="0" anchor="ctr">
+          <a:bodyPr wrap="square" lIns="0" rIns="0" tIns="0" bIns="0" anchor="t">
             <a:spAutoFit/>
           </a:bodyPr>
           <a:lstStyle/>
@@ -18587,7 +18595,7 @@
         </p:nvSpPr>
         <p:spPr>
           <a:xfrm>
-            <a:off x="502920" y="1005840"/>
+            <a:off x="502920" y="1532128"/>
             <a:ext cx="11185855" cy="12700"/>
           </a:xfrm>
           <a:prstGeom prst="rect">
@@ -18631,8 +18639,8 @@
         </p:nvSpPr>
         <p:spPr>
           <a:xfrm>
-            <a:off x="502920" y="1115568"/>
-            <a:ext cx="3606698" cy="4736592"/>
+            <a:off x="502920" y="1641856"/>
+            <a:ext cx="3606698" cy="4210304"/>
           </a:xfrm>
           <a:prstGeom prst="rect">
             <a:avLst/>
@@ -18677,7 +18685,7 @@
         </p:nvSpPr>
         <p:spPr>
           <a:xfrm>
-            <a:off x="502920" y="1115568"/>
+            <a:off x="502920" y="1641856"/>
             <a:ext cx="3606698" cy="64008"/>
           </a:xfrm>
           <a:prstGeom prst="rect">
@@ -18721,7 +18729,7 @@
         </p:nvSpPr>
         <p:spPr>
           <a:xfrm>
-            <a:off x="731520" y="1389888"/>
+            <a:off x="731520" y="1916176"/>
             <a:ext cx="3149498" cy="365760"/>
           </a:xfrm>
           <a:prstGeom prst="rect">
@@ -18756,8 +18764,8 @@
         </p:nvSpPr>
         <p:spPr>
           <a:xfrm>
-            <a:off x="731520" y="1892808"/>
-            <a:ext cx="3149498" cy="3822192"/>
+            <a:off x="731520" y="2419096"/>
+            <a:ext cx="3149498" cy="3295904"/>
           </a:xfrm>
           <a:prstGeom prst="rect">
             <a:avLst/>
@@ -18890,8 +18898,8 @@
         </p:nvSpPr>
         <p:spPr>
           <a:xfrm>
-            <a:off x="4292498" y="1115568"/>
-            <a:ext cx="3606698" cy="4736592"/>
+            <a:off x="4292498" y="1641856"/>
+            <a:ext cx="3606698" cy="4210304"/>
           </a:xfrm>
           <a:prstGeom prst="rect">
             <a:avLst/>
@@ -18936,7 +18944,7 @@
         </p:nvSpPr>
         <p:spPr>
           <a:xfrm>
-            <a:off x="4292498" y="1115568"/>
+            <a:off x="4292498" y="1641856"/>
             <a:ext cx="3606698" cy="64008"/>
           </a:xfrm>
           <a:prstGeom prst="rect">
@@ -18980,7 +18988,7 @@
         </p:nvSpPr>
         <p:spPr>
           <a:xfrm>
-            <a:off x="4521098" y="1389888"/>
+            <a:off x="4521098" y="1916176"/>
             <a:ext cx="3149498" cy="365760"/>
           </a:xfrm>
           <a:prstGeom prst="rect">
@@ -19015,8 +19023,8 @@
         </p:nvSpPr>
         <p:spPr>
           <a:xfrm>
-            <a:off x="4521098" y="1892808"/>
-            <a:ext cx="3149498" cy="3822192"/>
+            <a:off x="4521098" y="2419096"/>
+            <a:ext cx="3149498" cy="3295904"/>
           </a:xfrm>
           <a:prstGeom prst="rect">
             <a:avLst/>
@@ -19140,8 +19148,8 @@
         </p:nvSpPr>
         <p:spPr>
           <a:xfrm>
-            <a:off x="8082076" y="1115568"/>
-            <a:ext cx="3606698" cy="4736592"/>
+            <a:off x="8082076" y="1641856"/>
+            <a:ext cx="3606698" cy="4210304"/>
           </a:xfrm>
           <a:prstGeom prst="rect">
             <a:avLst/>
@@ -19186,7 +19194,7 @@
         </p:nvSpPr>
         <p:spPr>
           <a:xfrm>
-            <a:off x="8082076" y="1115568"/>
+            <a:off x="8082076" y="1641856"/>
             <a:ext cx="3606698" cy="64008"/>
           </a:xfrm>
           <a:prstGeom prst="rect">
@@ -19230,7 +19238,7 @@
         </p:nvSpPr>
         <p:spPr>
           <a:xfrm>
-            <a:off x="8310676" y="1389888"/>
+            <a:off x="8310676" y="1916176"/>
             <a:ext cx="3149498" cy="365760"/>
           </a:xfrm>
           <a:prstGeom prst="rect">
@@ -19265,8 +19273,8 @@
         </p:nvSpPr>
         <p:spPr>
           <a:xfrm>
-            <a:off x="8310676" y="1892808"/>
-            <a:ext cx="3149498" cy="3822192"/>
+            <a:off x="8310676" y="2419096"/>
+            <a:ext cx="3149498" cy="3295904"/>
           </a:xfrm>
           <a:prstGeom prst="rect">
             <a:avLst/>
@@ -19695,7 +19703,7 @@
         <p:spPr>
           <a:xfrm>
             <a:off x="4206240" y="475488"/>
-            <a:ext cx="7482535" cy="640080"/>
+            <a:ext cx="7482535" cy="555752"/>
           </a:xfrm>
           <a:prstGeom prst="rect">
             <a:avLst/>
@@ -19729,7 +19737,7 @@
         </p:nvSpPr>
         <p:spPr>
           <a:xfrm>
-            <a:off x="502920" y="1005840"/>
+            <a:off x="502920" y="1140968"/>
             <a:ext cx="11185855" cy="12700"/>
           </a:xfrm>
           <a:prstGeom prst="rect">
@@ -19773,7 +19781,7 @@
         </p:nvSpPr>
         <p:spPr>
           <a:xfrm>
-            <a:off x="502920" y="1115568"/>
+            <a:off x="502920" y="1250696"/>
             <a:ext cx="3606698" cy="3108960"/>
           </a:xfrm>
           <a:prstGeom prst="rect">
@@ -19819,7 +19827,7 @@
         </p:nvSpPr>
         <p:spPr>
           <a:xfrm>
-            <a:off x="502920" y="1115568"/>
+            <a:off x="502920" y="1250696"/>
             <a:ext cx="3606698" cy="64008"/>
           </a:xfrm>
           <a:prstGeom prst="rect">
@@ -19863,7 +19871,7 @@
         </p:nvSpPr>
         <p:spPr>
           <a:xfrm>
-            <a:off x="731520" y="1389888"/>
+            <a:off x="731520" y="1525016"/>
             <a:ext cx="3149498" cy="365760"/>
           </a:xfrm>
           <a:prstGeom prst="rect">
@@ -19898,7 +19906,7 @@
         </p:nvSpPr>
         <p:spPr>
           <a:xfrm>
-            <a:off x="731520" y="1892808"/>
+            <a:off x="731520" y="2027936"/>
             <a:ext cx="3149498" cy="2194560"/>
           </a:xfrm>
           <a:prstGeom prst="rect">
@@ -19946,7 +19954,7 @@
         </p:nvSpPr>
         <p:spPr>
           <a:xfrm>
-            <a:off x="4292498" y="1115568"/>
+            <a:off x="4292498" y="1250696"/>
             <a:ext cx="3606698" cy="3108960"/>
           </a:xfrm>
           <a:prstGeom prst="rect">
@@ -19992,7 +20000,7 @@
         </p:nvSpPr>
         <p:spPr>
           <a:xfrm>
-            <a:off x="4292498" y="1115568"/>
+            <a:off x="4292498" y="1250696"/>
             <a:ext cx="3606698" cy="64008"/>
           </a:xfrm>
           <a:prstGeom prst="rect">
@@ -20036,7 +20044,7 @@
         </p:nvSpPr>
         <p:spPr>
           <a:xfrm>
-            <a:off x="4521098" y="1389888"/>
+            <a:off x="4521098" y="1525016"/>
             <a:ext cx="3149498" cy="365760"/>
           </a:xfrm>
           <a:prstGeom prst="rect">
@@ -20071,7 +20079,7 @@
         </p:nvSpPr>
         <p:spPr>
           <a:xfrm>
-            <a:off x="4521098" y="1892808"/>
+            <a:off x="4521098" y="2027936"/>
             <a:ext cx="3149498" cy="2194560"/>
           </a:xfrm>
           <a:prstGeom prst="rect">
@@ -20110,7 +20118,7 @@
         </p:nvSpPr>
         <p:spPr>
           <a:xfrm>
-            <a:off x="8082076" y="1115568"/>
+            <a:off x="8082076" y="1250696"/>
             <a:ext cx="3606698" cy="3108960"/>
           </a:xfrm>
           <a:prstGeom prst="rect">
@@ -20156,7 +20164,7 @@
         </p:nvSpPr>
         <p:spPr>
           <a:xfrm>
-            <a:off x="8082076" y="1115568"/>
+            <a:off x="8082076" y="1250696"/>
             <a:ext cx="3606698" cy="64008"/>
           </a:xfrm>
           <a:prstGeom prst="rect">
@@ -20200,7 +20208,7 @@
         </p:nvSpPr>
         <p:spPr>
           <a:xfrm>
-            <a:off x="8310676" y="1389888"/>
+            <a:off x="8310676" y="1525016"/>
             <a:ext cx="3149498" cy="365760"/>
           </a:xfrm>
           <a:prstGeom prst="rect">
@@ -20235,7 +20243,7 @@
         </p:nvSpPr>
         <p:spPr>
           <a:xfrm>
-            <a:off x="8310676" y="1892808"/>
+            <a:off x="8310676" y="2027936"/>
             <a:ext cx="3149498" cy="2194560"/>
           </a:xfrm>
           <a:prstGeom prst="rect">
@@ -20292,8 +20300,8 @@
         </p:nvSpPr>
         <p:spPr>
           <a:xfrm>
-            <a:off x="502920" y="4453128"/>
-            <a:ext cx="11185855" cy="1901952"/>
+            <a:off x="502920" y="4588256"/>
+            <a:ext cx="11185855" cy="1766824"/>
           </a:xfrm>
           <a:prstGeom prst="rect">
             <a:avLst/>
@@ -20336,8 +20344,8 @@
         </p:nvSpPr>
         <p:spPr>
           <a:xfrm>
-            <a:off x="502920" y="4453128"/>
-            <a:ext cx="91440" cy="1901952"/>
+            <a:off x="502920" y="4588256"/>
+            <a:ext cx="91440" cy="1766824"/>
           </a:xfrm>
           <a:prstGeom prst="rect">
             <a:avLst/>
@@ -20380,7 +20388,7 @@
         </p:nvSpPr>
         <p:spPr>
           <a:xfrm>
-            <a:off x="777240" y="4636008"/>
+            <a:off x="777240" y="4771136"/>
             <a:ext cx="10637215" cy="365760"/>
           </a:xfrm>
           <a:prstGeom prst="rect">
@@ -20415,8 +20423,8 @@
         </p:nvSpPr>
         <p:spPr>
           <a:xfrm>
-            <a:off x="777240" y="5047488"/>
-            <a:ext cx="10637215" cy="1170432"/>
+            <a:off x="777240" y="5182616"/>
+            <a:ext cx="10637215" cy="1035304"/>
           </a:xfrm>
           <a:prstGeom prst="rect">
             <a:avLst/>
@@ -20756,7 +20764,7 @@
         <p:spPr>
           <a:xfrm>
             <a:off x="4325112" y="475488"/>
-            <a:ext cx="7363663" cy="640080"/>
+            <a:ext cx="7363663" cy="555752"/>
           </a:xfrm>
           <a:prstGeom prst="rect">
             <a:avLst/>
@@ -20790,7 +20798,7 @@
         </p:nvSpPr>
         <p:spPr>
           <a:xfrm>
-            <a:off x="502920" y="1005840"/>
+            <a:off x="502920" y="1140968"/>
             <a:ext cx="11185855" cy="12700"/>
           </a:xfrm>
           <a:prstGeom prst="rect">
@@ -20834,8 +20842,8 @@
         </p:nvSpPr>
         <p:spPr>
           <a:xfrm>
-            <a:off x="502920" y="1207008"/>
-            <a:ext cx="5410047" cy="4187952"/>
+            <a:off x="502920" y="1342136"/>
+            <a:ext cx="5410047" cy="4052824"/>
           </a:xfrm>
           <a:prstGeom prst="rect">
             <a:avLst/>
@@ -20880,8 +20888,8 @@
         </p:nvSpPr>
         <p:spPr>
           <a:xfrm>
-            <a:off x="502920" y="1207008"/>
-            <a:ext cx="91440" cy="4187952"/>
+            <a:off x="502920" y="1342136"/>
+            <a:ext cx="91440" cy="4052824"/>
           </a:xfrm>
           <a:prstGeom prst="rect">
             <a:avLst/>
@@ -20924,7 +20932,7 @@
         </p:nvSpPr>
         <p:spPr>
           <a:xfrm>
-            <a:off x="777240" y="1481328"/>
+            <a:off x="777240" y="1616456"/>
             <a:ext cx="4861407" cy="365760"/>
           </a:xfrm>
           <a:prstGeom prst="rect">
@@ -20959,7 +20967,7 @@
         </p:nvSpPr>
         <p:spPr>
           <a:xfrm>
-            <a:off x="777240" y="1984248"/>
+            <a:off x="777240" y="2119376"/>
             <a:ext cx="4861407" cy="1828800"/>
           </a:xfrm>
           <a:prstGeom prst="rect">
@@ -20998,7 +21006,7 @@
         </p:nvSpPr>
         <p:spPr>
           <a:xfrm>
-            <a:off x="777240" y="2761488"/>
+            <a:off x="777240" y="2896616"/>
             <a:ext cx="4861407" cy="1828800"/>
           </a:xfrm>
           <a:prstGeom prst="rect">
@@ -21037,8 +21045,8 @@
         </p:nvSpPr>
         <p:spPr>
           <a:xfrm>
-            <a:off x="6278727" y="1207008"/>
-            <a:ext cx="5410047" cy="4187952"/>
+            <a:off x="6278727" y="1342136"/>
+            <a:ext cx="5410047" cy="4052824"/>
           </a:xfrm>
           <a:prstGeom prst="rect">
             <a:avLst/>
@@ -21081,8 +21089,8 @@
         </p:nvSpPr>
         <p:spPr>
           <a:xfrm>
-            <a:off x="6278727" y="1207008"/>
-            <a:ext cx="91440" cy="4187952"/>
+            <a:off x="6278727" y="1342136"/>
+            <a:ext cx="91440" cy="4052824"/>
           </a:xfrm>
           <a:prstGeom prst="rect">
             <a:avLst/>
@@ -21125,7 +21133,7 @@
         </p:nvSpPr>
         <p:spPr>
           <a:xfrm>
-            <a:off x="6553047" y="1481328"/>
+            <a:off x="6553047" y="1616456"/>
             <a:ext cx="4861407" cy="365760"/>
           </a:xfrm>
           <a:prstGeom prst="rect">
@@ -21160,7 +21168,7 @@
         </p:nvSpPr>
         <p:spPr>
           <a:xfrm>
-            <a:off x="6553047" y="1984248"/>
+            <a:off x="6553047" y="2119376"/>
             <a:ext cx="4861407" cy="1828800"/>
           </a:xfrm>
           <a:prstGeom prst="rect">
@@ -21199,7 +21207,7 @@
         </p:nvSpPr>
         <p:spPr>
           <a:xfrm>
-            <a:off x="6553047" y="2761488"/>
+            <a:off x="6553047" y="2896616"/>
             <a:ext cx="4861407" cy="1828800"/>
           </a:xfrm>
           <a:prstGeom prst="rect">
@@ -21570,7 +21578,7 @@
         <p:spPr>
           <a:xfrm>
             <a:off x="2066544" y="475488"/>
-            <a:ext cx="9622231" cy="640080"/>
+            <a:ext cx="9622231" cy="555752"/>
           </a:xfrm>
           <a:prstGeom prst="rect">
             <a:avLst/>
@@ -21604,7 +21612,7 @@
         </p:nvSpPr>
         <p:spPr>
           <a:xfrm>
-            <a:off x="502920" y="1005840"/>
+            <a:off x="502920" y="1140968"/>
             <a:ext cx="11185855" cy="12700"/>
           </a:xfrm>
           <a:prstGeom prst="rect">
@@ -21648,7 +21656,7 @@
         </p:nvSpPr>
         <p:spPr>
           <a:xfrm>
-            <a:off x="502920" y="1207008"/>
+            <a:off x="502920" y="1342136"/>
             <a:ext cx="5410047" cy="640080"/>
           </a:xfrm>
           <a:prstGeom prst="rect">
@@ -21687,8 +21695,8 @@
         </p:nvSpPr>
         <p:spPr>
           <a:xfrm>
-            <a:off x="502920" y="1892808"/>
-            <a:ext cx="5410047" cy="4370832"/>
+            <a:off x="502920" y="2027936"/>
+            <a:ext cx="5410047" cy="4235704"/>
           </a:xfrm>
           <a:prstGeom prst="rect">
             <a:avLst/>
@@ -21895,8 +21903,8 @@
         </p:nvSpPr>
         <p:spPr>
           <a:xfrm>
-            <a:off x="6278727" y="1207008"/>
-            <a:ext cx="5410047" cy="4965192"/>
+            <a:off x="6278727" y="1342136"/>
+            <a:ext cx="5410047" cy="4830064"/>
           </a:xfrm>
           <a:prstGeom prst="rect">
             <a:avLst/>
@@ -21939,8 +21947,8 @@
         </p:nvSpPr>
         <p:spPr>
           <a:xfrm>
-            <a:off x="6278727" y="1207008"/>
-            <a:ext cx="91440" cy="4965192"/>
+            <a:off x="6278727" y="1342136"/>
+            <a:ext cx="91440" cy="4830064"/>
           </a:xfrm>
           <a:prstGeom prst="rect">
             <a:avLst/>
@@ -21983,7 +21991,7 @@
         </p:nvSpPr>
         <p:spPr>
           <a:xfrm>
-            <a:off x="6553047" y="1481328"/>
+            <a:off x="6553047" y="1616456"/>
             <a:ext cx="4861407" cy="365760"/>
           </a:xfrm>
           <a:prstGeom prst="rect">
@@ -22018,7 +22026,7 @@
         </p:nvSpPr>
         <p:spPr>
           <a:xfrm>
-            <a:off x="6553047" y="1984248"/>
+            <a:off x="6553047" y="2119376"/>
             <a:ext cx="4861407" cy="1828800"/>
           </a:xfrm>
           <a:prstGeom prst="rect">
@@ -22075,7 +22083,7 @@
         </p:nvSpPr>
         <p:spPr>
           <a:xfrm>
-            <a:off x="6553047" y="2761488"/>
+            <a:off x="6553047" y="2896616"/>
             <a:ext cx="4861407" cy="1828800"/>
           </a:xfrm>
           <a:prstGeom prst="rect">
@@ -22775,7 +22783,7 @@
         <p:spPr>
           <a:xfrm>
             <a:off x="3730752" y="475488"/>
-            <a:ext cx="7958023" cy="640080"/>
+            <a:ext cx="7958023" cy="555752"/>
           </a:xfrm>
           <a:prstGeom prst="rect">
             <a:avLst/>
@@ -22809,7 +22817,7 @@
         </p:nvSpPr>
         <p:spPr>
           <a:xfrm>
-            <a:off x="502920" y="1005840"/>
+            <a:off x="502920" y="1140968"/>
             <a:ext cx="11185855" cy="12700"/>
           </a:xfrm>
           <a:prstGeom prst="rect">
@@ -22853,8 +22861,8 @@
         </p:nvSpPr>
         <p:spPr>
           <a:xfrm>
-            <a:off x="502920" y="1115568"/>
-            <a:ext cx="5455767" cy="5239512"/>
+            <a:off x="502920" y="1250696"/>
+            <a:ext cx="5455767" cy="5104384"/>
           </a:xfrm>
           <a:prstGeom prst="rect">
             <a:avLst/>
@@ -22899,7 +22907,7 @@
         </p:nvSpPr>
         <p:spPr>
           <a:xfrm>
-            <a:off x="502920" y="1115568"/>
+            <a:off x="502920" y="1250696"/>
             <a:ext cx="5455767" cy="64008"/>
           </a:xfrm>
           <a:prstGeom prst="rect">
@@ -22943,7 +22951,7 @@
         </p:nvSpPr>
         <p:spPr>
           <a:xfrm>
-            <a:off x="777240" y="1389888"/>
+            <a:off x="777240" y="1525016"/>
             <a:ext cx="4907127" cy="274320"/>
           </a:xfrm>
           <a:prstGeom prst="rect">
@@ -22978,7 +22986,7 @@
         </p:nvSpPr>
         <p:spPr>
           <a:xfrm>
-            <a:off x="777240" y="1709928"/>
+            <a:off x="777240" y="1845056"/>
             <a:ext cx="4907127" cy="548640"/>
           </a:xfrm>
           <a:prstGeom prst="rect">
@@ -23017,7 +23025,7 @@
         </p:nvSpPr>
         <p:spPr>
           <a:xfrm>
-            <a:off x="777240" y="2304288"/>
+            <a:off x="777240" y="2439416"/>
             <a:ext cx="4907127" cy="914400"/>
           </a:xfrm>
           <a:prstGeom prst="rect">
@@ -23056,8 +23064,8 @@
         </p:nvSpPr>
         <p:spPr>
           <a:xfrm>
-            <a:off x="777240" y="3081528"/>
-            <a:ext cx="4907127" cy="3090672"/>
+            <a:off x="777240" y="3216656"/>
+            <a:ext cx="4907127" cy="2955544"/>
           </a:xfrm>
           <a:prstGeom prst="rect">
             <a:avLst/>
@@ -23219,8 +23227,8 @@
         </p:nvSpPr>
         <p:spPr>
           <a:xfrm>
-            <a:off x="6233007" y="1115568"/>
-            <a:ext cx="5455767" cy="5239512"/>
+            <a:off x="6233007" y="1250696"/>
+            <a:ext cx="5455767" cy="5104384"/>
           </a:xfrm>
           <a:prstGeom prst="rect">
             <a:avLst/>
@@ -23265,7 +23273,7 @@
         </p:nvSpPr>
         <p:spPr>
           <a:xfrm>
-            <a:off x="6233007" y="1115568"/>
+            <a:off x="6233007" y="1250696"/>
             <a:ext cx="5455767" cy="64008"/>
           </a:xfrm>
           <a:prstGeom prst="rect">
@@ -23309,7 +23317,7 @@
         </p:nvSpPr>
         <p:spPr>
           <a:xfrm>
-            <a:off x="6507327" y="1389888"/>
+            <a:off x="6507327" y="1525016"/>
             <a:ext cx="4907127" cy="274320"/>
           </a:xfrm>
           <a:prstGeom prst="rect">
@@ -23344,7 +23352,7 @@
         </p:nvSpPr>
         <p:spPr>
           <a:xfrm>
-            <a:off x="6507327" y="1709928"/>
+            <a:off x="6507327" y="1845056"/>
             <a:ext cx="4907127" cy="548640"/>
           </a:xfrm>
           <a:prstGeom prst="rect">
@@ -23383,7 +23391,7 @@
         </p:nvSpPr>
         <p:spPr>
           <a:xfrm>
-            <a:off x="6507327" y="2304288"/>
+            <a:off x="6507327" y="2439416"/>
             <a:ext cx="4907127" cy="914400"/>
           </a:xfrm>
           <a:prstGeom prst="rect">
@@ -23422,8 +23430,8 @@
         </p:nvSpPr>
         <p:spPr>
           <a:xfrm>
-            <a:off x="6507327" y="3081528"/>
-            <a:ext cx="4907127" cy="3090672"/>
+            <a:off x="6507327" y="3216656"/>
+            <a:ext cx="4907127" cy="2955544"/>
           </a:xfrm>
           <a:prstGeom prst="rect">
             <a:avLst/>
@@ -23841,7 +23849,7 @@
         <p:spPr>
           <a:xfrm>
             <a:off x="2057400" y="475488"/>
-            <a:ext cx="9631375" cy="640080"/>
+            <a:ext cx="9631375" cy="946912"/>
           </a:xfrm>
           <a:prstGeom prst="rect">
             <a:avLst/>
@@ -23849,7 +23857,7 @@
           <a:noFill/>
         </p:spPr>
         <p:txBody>
-          <a:bodyPr wrap="square" lIns="0" rIns="0" tIns="0" bIns="0" anchor="ctr">
+          <a:bodyPr wrap="square" lIns="0" rIns="0" tIns="0" bIns="0" anchor="t">
             <a:spAutoFit/>
           </a:bodyPr>
           <a:lstStyle/>
@@ -23875,7 +23883,7 @@
         </p:nvSpPr>
         <p:spPr>
           <a:xfrm>
-            <a:off x="502920" y="1005840"/>
+            <a:off x="502920" y="1532128"/>
             <a:ext cx="11185855" cy="12700"/>
           </a:xfrm>
           <a:prstGeom prst="rect">
@@ -23920,7 +23928,7 @@
           <p:nvPr/>
         </p:nvGraphicFramePr>
         <p:xfrm>
-          <a:off x="502920" y="1252728"/>
+          <a:off x="502920" y="1779016"/>
           <a:ext cx="11185855" cy="3474720"/>
         </p:xfrm>
         <a:graphic>
@@ -24683,7 +24691,7 @@
         <p:spPr>
           <a:xfrm>
             <a:off x="4562856" y="475488"/>
-            <a:ext cx="7125919" cy="640080"/>
+            <a:ext cx="7125919" cy="555752"/>
           </a:xfrm>
           <a:prstGeom prst="rect">
             <a:avLst/>
@@ -24717,7 +24725,7 @@
         </p:nvSpPr>
         <p:spPr>
           <a:xfrm>
-            <a:off x="502920" y="1005840"/>
+            <a:off x="502920" y="1140968"/>
             <a:ext cx="11185855" cy="12700"/>
           </a:xfrm>
           <a:prstGeom prst="rect">
@@ -24761,8 +24769,8 @@
         </p:nvSpPr>
         <p:spPr>
           <a:xfrm>
-            <a:off x="502920" y="1298448"/>
-            <a:ext cx="11185855" cy="5056632"/>
+            <a:off x="502920" y="1433576"/>
+            <a:ext cx="11185855" cy="4921504"/>
           </a:xfrm>
           <a:prstGeom prst="rect">
             <a:avLst/>
@@ -24807,7 +24815,7 @@
         </p:nvSpPr>
         <p:spPr>
           <a:xfrm>
-            <a:off x="502920" y="1298448"/>
+            <a:off x="502920" y="1433576"/>
             <a:ext cx="11185855" cy="91440"/>
           </a:xfrm>
           <a:prstGeom prst="rect">
@@ -24851,8 +24859,8 @@
         </p:nvSpPr>
         <p:spPr>
           <a:xfrm>
-            <a:off x="960120" y="2121408"/>
-            <a:ext cx="10271455" cy="3227832"/>
+            <a:off x="960120" y="2256536"/>
+            <a:ext cx="10271455" cy="3092704"/>
           </a:xfrm>
           <a:prstGeom prst="rect">
             <a:avLst/>
@@ -25488,7 +25496,7 @@
         <p:spPr>
           <a:xfrm>
             <a:off x="3493008" y="475488"/>
-            <a:ext cx="8195767" cy="640080"/>
+            <a:ext cx="8195767" cy="946912"/>
           </a:xfrm>
           <a:prstGeom prst="rect">
             <a:avLst/>
@@ -25496,7 +25504,7 @@
           <a:noFill/>
         </p:spPr>
         <p:txBody>
-          <a:bodyPr wrap="square" lIns="0" rIns="0" tIns="0" bIns="0" anchor="ctr">
+          <a:bodyPr wrap="square" lIns="0" rIns="0" tIns="0" bIns="0" anchor="t">
             <a:spAutoFit/>
           </a:bodyPr>
           <a:lstStyle/>
@@ -25522,7 +25530,7 @@
         </p:nvSpPr>
         <p:spPr>
           <a:xfrm>
-            <a:off x="502920" y="1005840"/>
+            <a:off x="502920" y="1532128"/>
             <a:ext cx="11185855" cy="12700"/>
           </a:xfrm>
           <a:prstGeom prst="rect">
@@ -25566,7 +25574,7 @@
         </p:nvSpPr>
         <p:spPr>
           <a:xfrm>
-            <a:off x="502920" y="1115568"/>
+            <a:off x="502920" y="1641856"/>
             <a:ext cx="2105497" cy="2194560"/>
           </a:xfrm>
           <a:prstGeom prst="rect">
@@ -25612,7 +25620,7 @@
         </p:nvSpPr>
         <p:spPr>
           <a:xfrm>
-            <a:off x="502920" y="1115568"/>
+            <a:off x="502920" y="1641856"/>
             <a:ext cx="2105497" cy="64008"/>
           </a:xfrm>
           <a:prstGeom prst="rect">
@@ -25656,7 +25664,7 @@
         </p:nvSpPr>
         <p:spPr>
           <a:xfrm>
-            <a:off x="594360" y="1389888"/>
+            <a:off x="594360" y="1916176"/>
             <a:ext cx="1922617" cy="822960"/>
           </a:xfrm>
           <a:prstGeom prst="rect">
@@ -25695,7 +25703,7 @@
         </p:nvSpPr>
         <p:spPr>
           <a:xfrm>
-            <a:off x="594360" y="2212848"/>
+            <a:off x="594360" y="2739136"/>
             <a:ext cx="1922617" cy="822960"/>
           </a:xfrm>
           <a:prstGeom prst="rect">
@@ -25752,7 +25760,7 @@
         </p:nvSpPr>
         <p:spPr>
           <a:xfrm>
-            <a:off x="594360" y="2898648"/>
+            <a:off x="594360" y="3424936"/>
             <a:ext cx="1922617" cy="274320"/>
           </a:xfrm>
           <a:prstGeom prst="rect">
@@ -25787,7 +25795,7 @@
         </p:nvSpPr>
         <p:spPr>
           <a:xfrm>
-            <a:off x="2773009" y="1115568"/>
+            <a:off x="2773009" y="1641856"/>
             <a:ext cx="2105497" cy="2194560"/>
           </a:xfrm>
           <a:prstGeom prst="rect">
@@ -25833,7 +25841,7 @@
         </p:nvSpPr>
         <p:spPr>
           <a:xfrm>
-            <a:off x="2773009" y="1115568"/>
+            <a:off x="2773009" y="1641856"/>
             <a:ext cx="2105497" cy="64008"/>
           </a:xfrm>
           <a:prstGeom prst="rect">
@@ -25877,7 +25885,7 @@
         </p:nvSpPr>
         <p:spPr>
           <a:xfrm>
-            <a:off x="2864449" y="1389888"/>
+            <a:off x="2864449" y="1916176"/>
             <a:ext cx="1922617" cy="822960"/>
           </a:xfrm>
           <a:prstGeom prst="rect">
@@ -25916,7 +25924,7 @@
         </p:nvSpPr>
         <p:spPr>
           <a:xfrm>
-            <a:off x="2864449" y="2212848"/>
+            <a:off x="2864449" y="2739136"/>
             <a:ext cx="1922617" cy="822960"/>
           </a:xfrm>
           <a:prstGeom prst="rect">
@@ -25973,7 +25981,7 @@
         </p:nvSpPr>
         <p:spPr>
           <a:xfrm>
-            <a:off x="2864449" y="2898648"/>
+            <a:off x="2864449" y="3424936"/>
             <a:ext cx="1922617" cy="274320"/>
           </a:xfrm>
           <a:prstGeom prst="rect">
@@ -26008,7 +26016,7 @@
         </p:nvSpPr>
         <p:spPr>
           <a:xfrm>
-            <a:off x="5043098" y="1115568"/>
+            <a:off x="5043098" y="1641856"/>
             <a:ext cx="2105497" cy="2194560"/>
           </a:xfrm>
           <a:prstGeom prst="rect">
@@ -26054,7 +26062,7 @@
         </p:nvSpPr>
         <p:spPr>
           <a:xfrm>
-            <a:off x="5043098" y="1115568"/>
+            <a:off x="5043098" y="1641856"/>
             <a:ext cx="2105497" cy="64008"/>
           </a:xfrm>
           <a:prstGeom prst="rect">
@@ -26098,7 +26106,7 @@
         </p:nvSpPr>
         <p:spPr>
           <a:xfrm>
-            <a:off x="5134538" y="1389888"/>
+            <a:off x="5134538" y="1916176"/>
             <a:ext cx="1922617" cy="822960"/>
           </a:xfrm>
           <a:prstGeom prst="rect">
@@ -26137,7 +26145,7 @@
         </p:nvSpPr>
         <p:spPr>
           <a:xfrm>
-            <a:off x="5134538" y="2212848"/>
+            <a:off x="5134538" y="2739136"/>
             <a:ext cx="1922617" cy="822960"/>
           </a:xfrm>
           <a:prstGeom prst="rect">
@@ -26176,7 +26184,7 @@
         </p:nvSpPr>
         <p:spPr>
           <a:xfrm>
-            <a:off x="5134538" y="2898648"/>
+            <a:off x="5134538" y="3424936"/>
             <a:ext cx="1922617" cy="274320"/>
           </a:xfrm>
           <a:prstGeom prst="rect">
@@ -26211,7 +26219,7 @@
         </p:nvSpPr>
         <p:spPr>
           <a:xfrm>
-            <a:off x="7313188" y="1115568"/>
+            <a:off x="7313188" y="1641856"/>
             <a:ext cx="2105497" cy="2194560"/>
           </a:xfrm>
           <a:prstGeom prst="rect">
@@ -26257,7 +26265,7 @@
         </p:nvSpPr>
         <p:spPr>
           <a:xfrm>
-            <a:off x="7313188" y="1115568"/>
+            <a:off x="7313188" y="1641856"/>
             <a:ext cx="2105497" cy="64008"/>
           </a:xfrm>
           <a:prstGeom prst="rect">
@@ -26301,7 +26309,7 @@
         </p:nvSpPr>
         <p:spPr>
           <a:xfrm>
-            <a:off x="7404628" y="1389888"/>
+            <a:off x="7404628" y="1916176"/>
             <a:ext cx="1922617" cy="822960"/>
           </a:xfrm>
           <a:prstGeom prst="rect">
@@ -26340,7 +26348,7 @@
         </p:nvSpPr>
         <p:spPr>
           <a:xfrm>
-            <a:off x="7404628" y="2212848"/>
+            <a:off x="7404628" y="2739136"/>
             <a:ext cx="1922617" cy="822960"/>
           </a:xfrm>
           <a:prstGeom prst="rect">
@@ -26379,7 +26387,7 @@
         </p:nvSpPr>
         <p:spPr>
           <a:xfrm>
-            <a:off x="7404628" y="2898648"/>
+            <a:off x="7404628" y="3424936"/>
             <a:ext cx="1922617" cy="274320"/>
           </a:xfrm>
           <a:prstGeom prst="rect">
@@ -26414,7 +26422,7 @@
         </p:nvSpPr>
         <p:spPr>
           <a:xfrm>
-            <a:off x="9583277" y="1115568"/>
+            <a:off x="9583277" y="1641856"/>
             <a:ext cx="2105497" cy="2194560"/>
           </a:xfrm>
           <a:prstGeom prst="rect">
@@ -26460,7 +26468,7 @@
         </p:nvSpPr>
         <p:spPr>
           <a:xfrm>
-            <a:off x="9583277" y="1115568"/>
+            <a:off x="9583277" y="1641856"/>
             <a:ext cx="2105497" cy="64008"/>
           </a:xfrm>
           <a:prstGeom prst="rect">
@@ -26504,7 +26512,7 @@
         </p:nvSpPr>
         <p:spPr>
           <a:xfrm>
-            <a:off x="9674717" y="1389888"/>
+            <a:off x="9674717" y="1916176"/>
             <a:ext cx="1922617" cy="822960"/>
           </a:xfrm>
           <a:prstGeom prst="rect">
@@ -26543,7 +26551,7 @@
         </p:nvSpPr>
         <p:spPr>
           <a:xfrm>
-            <a:off x="9674717" y="2212848"/>
+            <a:off x="9674717" y="2739136"/>
             <a:ext cx="1922617" cy="822960"/>
           </a:xfrm>
           <a:prstGeom prst="rect">
@@ -26582,7 +26590,7 @@
         </p:nvSpPr>
         <p:spPr>
           <a:xfrm>
-            <a:off x="9674717" y="2898648"/>
+            <a:off x="9674717" y="3424936"/>
             <a:ext cx="1922617" cy="274320"/>
           </a:xfrm>
           <a:prstGeom prst="rect">
@@ -26617,7 +26625,7 @@
         </p:nvSpPr>
         <p:spPr>
           <a:xfrm>
-            <a:off x="502920" y="3538728"/>
+            <a:off x="502920" y="4065016"/>
             <a:ext cx="11185855" cy="640080"/>
           </a:xfrm>
           <a:prstGeom prst="rect">
@@ -26993,7 +27001,7 @@
         <p:spPr>
           <a:xfrm>
             <a:off x="3493008" y="475488"/>
-            <a:ext cx="8195767" cy="640080"/>
+            <a:ext cx="8195767" cy="555752"/>
           </a:xfrm>
           <a:prstGeom prst="rect">
             <a:avLst/>
@@ -27027,7 +27035,7 @@
         </p:nvSpPr>
         <p:spPr>
           <a:xfrm>
-            <a:off x="502920" y="1005840"/>
+            <a:off x="502920" y="1140968"/>
             <a:ext cx="11185855" cy="12700"/>
           </a:xfrm>
           <a:prstGeom prst="rect">
@@ -27071,8 +27079,8 @@
         </p:nvSpPr>
         <p:spPr>
           <a:xfrm>
-            <a:off x="502920" y="1298448"/>
-            <a:ext cx="11185855" cy="5056632"/>
+            <a:off x="502920" y="1433576"/>
+            <a:ext cx="11185855" cy="4921504"/>
           </a:xfrm>
           <a:prstGeom prst="rect">
             <a:avLst/>
@@ -27117,7 +27125,7 @@
         </p:nvSpPr>
         <p:spPr>
           <a:xfrm>
-            <a:off x="502920" y="1298448"/>
+            <a:off x="502920" y="1433576"/>
             <a:ext cx="11185855" cy="91440"/>
           </a:xfrm>
           <a:prstGeom prst="rect">
@@ -27161,7 +27169,7 @@
         </p:nvSpPr>
         <p:spPr>
           <a:xfrm>
-            <a:off x="960120" y="1938528"/>
+            <a:off x="960120" y="2073656"/>
             <a:ext cx="10271455" cy="1371600"/>
           </a:xfrm>
           <a:prstGeom prst="rect">
@@ -27218,7 +27226,7 @@
         </p:nvSpPr>
         <p:spPr>
           <a:xfrm>
-            <a:off x="1417320" y="3584448"/>
+            <a:off x="1417320" y="3719576"/>
             <a:ext cx="9357055" cy="2286000"/>
           </a:xfrm>
           <a:prstGeom prst="rect">
